--- a/slides/01_map_construction.pptx
+++ b/slides/01_map_construction.pptx
@@ -276,7 +276,7 @@
           <a:p>
             <a:fld id="{0340D7A9-3531-0F47-B241-50A1CAE6C0EC}" type="datetimeFigureOut">
               <a:rPr lang="en-US" smtClean="0"/>
-              <a:t>6/30/25</a:t>
+              <a:t>7/8/25</a:t>
             </a:fld>
             <a:endParaRPr lang="en-US"/>
           </a:p>
@@ -476,7 +476,7 @@
           <a:p>
             <a:fld id="{0340D7A9-3531-0F47-B241-50A1CAE6C0EC}" type="datetimeFigureOut">
               <a:rPr lang="en-US" smtClean="0"/>
-              <a:t>6/30/25</a:t>
+              <a:t>7/8/25</a:t>
             </a:fld>
             <a:endParaRPr lang="en-US"/>
           </a:p>
@@ -686,7 +686,7 @@
           <a:p>
             <a:fld id="{0340D7A9-3531-0F47-B241-50A1CAE6C0EC}" type="datetimeFigureOut">
               <a:rPr lang="en-US" smtClean="0"/>
-              <a:t>6/30/25</a:t>
+              <a:t>7/8/25</a:t>
             </a:fld>
             <a:endParaRPr lang="en-US"/>
           </a:p>
@@ -886,7 +886,7 @@
           <a:p>
             <a:fld id="{0340D7A9-3531-0F47-B241-50A1CAE6C0EC}" type="datetimeFigureOut">
               <a:rPr lang="en-US" smtClean="0"/>
-              <a:t>6/30/25</a:t>
+              <a:t>7/8/25</a:t>
             </a:fld>
             <a:endParaRPr lang="en-US"/>
           </a:p>
@@ -1162,7 +1162,7 @@
           <a:p>
             <a:fld id="{0340D7A9-3531-0F47-B241-50A1CAE6C0EC}" type="datetimeFigureOut">
               <a:rPr lang="en-US" smtClean="0"/>
-              <a:t>6/30/25</a:t>
+              <a:t>7/8/25</a:t>
             </a:fld>
             <a:endParaRPr lang="en-US"/>
           </a:p>
@@ -1430,7 +1430,7 @@
           <a:p>
             <a:fld id="{0340D7A9-3531-0F47-B241-50A1CAE6C0EC}" type="datetimeFigureOut">
               <a:rPr lang="en-US" smtClean="0"/>
-              <a:t>6/30/25</a:t>
+              <a:t>7/8/25</a:t>
             </a:fld>
             <a:endParaRPr lang="en-US"/>
           </a:p>
@@ -1845,7 +1845,7 @@
           <a:p>
             <a:fld id="{0340D7A9-3531-0F47-B241-50A1CAE6C0EC}" type="datetimeFigureOut">
               <a:rPr lang="en-US" smtClean="0"/>
-              <a:t>6/30/25</a:t>
+              <a:t>7/8/25</a:t>
             </a:fld>
             <a:endParaRPr lang="en-US"/>
           </a:p>
@@ -1987,7 +1987,7 @@
           <a:p>
             <a:fld id="{0340D7A9-3531-0F47-B241-50A1CAE6C0EC}" type="datetimeFigureOut">
               <a:rPr lang="en-US" smtClean="0"/>
-              <a:t>6/30/25</a:t>
+              <a:t>7/8/25</a:t>
             </a:fld>
             <a:endParaRPr lang="en-US"/>
           </a:p>
@@ -2100,7 +2100,7 @@
           <a:p>
             <a:fld id="{0340D7A9-3531-0F47-B241-50A1CAE6C0EC}" type="datetimeFigureOut">
               <a:rPr lang="en-US" smtClean="0"/>
-              <a:t>6/30/25</a:t>
+              <a:t>7/8/25</a:t>
             </a:fld>
             <a:endParaRPr lang="en-US"/>
           </a:p>
@@ -2413,7 +2413,7 @@
           <a:p>
             <a:fld id="{0340D7A9-3531-0F47-B241-50A1CAE6C0EC}" type="datetimeFigureOut">
               <a:rPr lang="en-US" smtClean="0"/>
-              <a:t>6/30/25</a:t>
+              <a:t>7/8/25</a:t>
             </a:fld>
             <a:endParaRPr lang="en-US"/>
           </a:p>
@@ -2702,7 +2702,7 @@
           <a:p>
             <a:fld id="{0340D7A9-3531-0F47-B241-50A1CAE6C0EC}" type="datetimeFigureOut">
               <a:rPr lang="en-US" smtClean="0"/>
-              <a:t>6/30/25</a:t>
+              <a:t>7/8/25</a:t>
             </a:fld>
             <a:endParaRPr lang="en-US"/>
           </a:p>
@@ -2945,7 +2945,7 @@
           <a:p>
             <a:fld id="{0340D7A9-3531-0F47-B241-50A1CAE6C0EC}" type="datetimeFigureOut">
               <a:rPr lang="en-US" smtClean="0"/>
-              <a:t>6/30/25</a:t>
+              <a:t>7/8/25</a:t>
             </a:fld>
             <a:endParaRPr lang="en-US"/>
           </a:p>
@@ -7209,8 +7209,8 @@
           </a:p>
         </p:txBody>
       </p:sp>
-      <mc:AlternateContent xmlns:mc="http://schemas.openxmlformats.org/markup-compatibility/2006" xmlns:a14="http://schemas.microsoft.com/office/drawing/2010/main">
-        <mc:Choice Requires="a14">
+      <mc:AlternateContent xmlns:mc="http://schemas.openxmlformats.org/markup-compatibility/2006">
+        <mc:Choice xmlns:a14="http://schemas.microsoft.com/office/drawing/2010/main" Requires="a14">
           <p:sp>
             <p:nvSpPr>
               <p:cNvPr id="8" name="TextBox 7">
@@ -7226,7 +7226,7 @@
             <p:spPr>
               <a:xfrm>
                 <a:off x="7924300" y="4815188"/>
-                <a:ext cx="2325196" cy="442429"/>
+                <a:ext cx="2325196" cy="406458"/>
               </a:xfrm>
               <a:prstGeom prst="rect">
                 <a:avLst/>
@@ -7306,83 +7306,143 @@
                           <m:t>𝑛</m:t>
                         </m:r>
                       </m:sub>
-                      <m:sup/>
-                      <m:e/>
+                      <m:sup>
+                        <m:r>
+                          <a:rPr lang="en-GB" sz="1800" b="0" i="1" smtClean="0">
+                            <a:effectLst/>
+                            <a:latin typeface="Cambria Math" panose="02040503050406030204" pitchFamily="18" charset="0"/>
+                            <a:ea typeface="Cambria Math" panose="02040503050406030204" pitchFamily="18" charset="0"/>
+                            <a:cs typeface="Cambria Math" panose="02040503050406030204" pitchFamily="18" charset="0"/>
+                          </a:rPr>
+                          <m:t> </m:t>
+                        </m:r>
+                      </m:sup>
+                      <m:e>
+                        <m:r>
+                          <m:rPr>
+                            <m:nor/>
+                          </m:rPr>
+                          <a:rPr lang="en-US" i="1" dirty="0">
+                            <a:latin typeface="Calibri" panose="020F0502020204030204" pitchFamily="34" charset="0"/>
+                            <a:ea typeface="Times New Roman" panose="02020603050405020304" pitchFamily="18" charset="0"/>
+                            <a:cs typeface="Times New Roman" panose="02020603050405020304" pitchFamily="18" charset="0"/>
+                          </a:rPr>
+                          <m:t>(</m:t>
+                        </m:r>
+                        <m:r>
+                          <m:rPr>
+                            <m:nor/>
+                          </m:rPr>
+                          <a:rPr lang="en-US" i="1" dirty="0">
+                            <a:latin typeface="Calibri" panose="020F0502020204030204" pitchFamily="34" charset="0"/>
+                            <a:ea typeface="Calibri" panose="020F0502020204030204" pitchFamily="34" charset="0"/>
+                            <a:cs typeface="Times New Roman" panose="02020603050405020304" pitchFamily="18" charset="0"/>
+                          </a:rPr>
+                          <m:t>D</m:t>
+                        </m:r>
+                        <m:r>
+                          <m:rPr>
+                            <m:nor/>
+                          </m:rPr>
+                          <a:rPr lang="en-US" i="1" baseline="-25000" dirty="0">
+                            <a:latin typeface="Calibri" panose="020F0502020204030204" pitchFamily="34" charset="0"/>
+                            <a:ea typeface="Calibri" panose="020F0502020204030204" pitchFamily="34" charset="0"/>
+                            <a:cs typeface="Times New Roman" panose="02020603050405020304" pitchFamily="18" charset="0"/>
+                          </a:rPr>
+                          <m:t>i</m:t>
+                        </m:r>
+                        <m:r>
+                          <m:rPr>
+                            <m:nor/>
+                          </m:rPr>
+                          <a:rPr lang="en-US" i="1" baseline="-25000" dirty="0">
+                            <a:latin typeface="Calibri" panose="020F0502020204030204" pitchFamily="34" charset="0"/>
+                            <a:ea typeface="Calibri" panose="020F0502020204030204" pitchFamily="34" charset="0"/>
+                            <a:cs typeface="Times New Roman" panose="02020603050405020304" pitchFamily="18" charset="0"/>
+                          </a:rPr>
+                          <m:t>,</m:t>
+                        </m:r>
+                        <m:r>
+                          <m:rPr>
+                            <m:nor/>
+                          </m:rPr>
+                          <a:rPr lang="en-US" i="1" baseline="-25000" dirty="0">
+                            <a:latin typeface="Calibri" panose="020F0502020204030204" pitchFamily="34" charset="0"/>
+                            <a:ea typeface="Calibri" panose="020F0502020204030204" pitchFamily="34" charset="0"/>
+                            <a:cs typeface="Times New Roman" panose="02020603050405020304" pitchFamily="18" charset="0"/>
+                          </a:rPr>
+                          <m:t>n</m:t>
+                        </m:r>
+                        <m:r>
+                          <m:rPr>
+                            <m:nor/>
+                          </m:rPr>
+                          <a:rPr lang="en-US" i="1" dirty="0">
+                            <a:latin typeface="Calibri" panose="020F0502020204030204" pitchFamily="34" charset="0"/>
+                            <a:ea typeface="Calibri" panose="020F0502020204030204" pitchFamily="34" charset="0"/>
+                            <a:cs typeface="Times New Roman" panose="02020603050405020304" pitchFamily="18" charset="0"/>
+                          </a:rPr>
+                          <m:t> – </m:t>
+                        </m:r>
+                        <m:r>
+                          <m:rPr>
+                            <m:nor/>
+                          </m:rPr>
+                          <a:rPr lang="en-US" i="1" dirty="0">
+                            <a:latin typeface="Calibri" panose="020F0502020204030204" pitchFamily="34" charset="0"/>
+                            <a:ea typeface="Calibri" panose="020F0502020204030204" pitchFamily="34" charset="0"/>
+                            <a:cs typeface="Times New Roman" panose="02020603050405020304" pitchFamily="18" charset="0"/>
+                          </a:rPr>
+                          <m:t>di</m:t>
+                        </m:r>
+                        <m:r>
+                          <m:rPr>
+                            <m:nor/>
+                          </m:rPr>
+                          <a:rPr lang="en-US" i="1" baseline="-25000" dirty="0">
+                            <a:latin typeface="Calibri" panose="020F0502020204030204" pitchFamily="34" charset="0"/>
+                            <a:ea typeface="Calibri" panose="020F0502020204030204" pitchFamily="34" charset="0"/>
+                            <a:cs typeface="Times New Roman" panose="02020603050405020304" pitchFamily="18" charset="0"/>
+                          </a:rPr>
+                          <m:t>,</m:t>
+                        </m:r>
+                        <m:r>
+                          <m:rPr>
+                            <m:nor/>
+                          </m:rPr>
+                          <a:rPr lang="en-US" i="1" baseline="-25000" dirty="0">
+                            <a:latin typeface="Calibri" panose="020F0502020204030204" pitchFamily="34" charset="0"/>
+                            <a:ea typeface="Calibri" panose="020F0502020204030204" pitchFamily="34" charset="0"/>
+                            <a:cs typeface="Times New Roman" panose="02020603050405020304" pitchFamily="18" charset="0"/>
+                          </a:rPr>
+                          <m:t>n</m:t>
+                        </m:r>
+                        <m:r>
+                          <m:rPr>
+                            <m:nor/>
+                          </m:rPr>
+                          <a:rPr lang="en-US" i="1" dirty="0">
+                            <a:latin typeface="Calibri" panose="020F0502020204030204" pitchFamily="34" charset="0"/>
+                            <a:ea typeface="Calibri" panose="020F0502020204030204" pitchFamily="34" charset="0"/>
+                            <a:cs typeface="Times New Roman" panose="02020603050405020304" pitchFamily="18" charset="0"/>
+                          </a:rPr>
+                          <m:t>)</m:t>
+                        </m:r>
+                        <m:r>
+                          <m:rPr>
+                            <m:nor/>
+                          </m:rPr>
+                          <a:rPr lang="en-US" i="1" baseline="30000" dirty="0">
+                            <a:latin typeface="Calibri" panose="020F0502020204030204" pitchFamily="34" charset="0"/>
+                            <a:ea typeface="Calibri" panose="020F0502020204030204" pitchFamily="34" charset="0"/>
+                            <a:cs typeface="Times New Roman" panose="02020603050405020304" pitchFamily="18" charset="0"/>
+                          </a:rPr>
+                          <m:t>2</m:t>
+                        </m:r>
+                      </m:e>
                     </m:nary>
                   </m:oMath>
                 </a14:m>
-                <a:r>
-                  <a:rPr lang="en-US" sz="1800" i="1" dirty="0">
-                    <a:effectLst/>
-                    <a:latin typeface="Calibri" panose="020F0502020204030204" pitchFamily="34" charset="0"/>
-                    <a:ea typeface="Times New Roman" panose="02020603050405020304" pitchFamily="18" charset="0"/>
-                    <a:cs typeface="Times New Roman" panose="02020603050405020304" pitchFamily="18" charset="0"/>
-                  </a:rPr>
-                  <a:t>(</a:t>
-                </a:r>
-                <a:r>
-                  <a:rPr lang="en-US" sz="1800" i="1" dirty="0" err="1">
-                    <a:effectLst/>
-                    <a:latin typeface="Calibri" panose="020F0502020204030204" pitchFamily="34" charset="0"/>
-                    <a:ea typeface="Calibri" panose="020F0502020204030204" pitchFamily="34" charset="0"/>
-                    <a:cs typeface="Times New Roman" panose="02020603050405020304" pitchFamily="18" charset="0"/>
-                  </a:rPr>
-                  <a:t>D</a:t>
-                </a:r>
-                <a:r>
-                  <a:rPr lang="en-US" sz="1800" i="1" baseline="-25000" dirty="0" err="1">
-                    <a:effectLst/>
-                    <a:latin typeface="Calibri" panose="020F0502020204030204" pitchFamily="34" charset="0"/>
-                    <a:ea typeface="Calibri" panose="020F0502020204030204" pitchFamily="34" charset="0"/>
-                    <a:cs typeface="Times New Roman" panose="02020603050405020304" pitchFamily="18" charset="0"/>
-                  </a:rPr>
-                  <a:t>i,n</a:t>
-                </a:r>
-                <a:r>
-                  <a:rPr lang="en-US" sz="1800" i="1" dirty="0">
-                    <a:effectLst/>
-                    <a:latin typeface="Calibri" panose="020F0502020204030204" pitchFamily="34" charset="0"/>
-                    <a:ea typeface="Calibri" panose="020F0502020204030204" pitchFamily="34" charset="0"/>
-                    <a:cs typeface="Times New Roman" panose="02020603050405020304" pitchFamily="18" charset="0"/>
-                  </a:rPr>
-                  <a:t> – </a:t>
-                </a:r>
-                <a:r>
-                  <a:rPr lang="en-US" sz="1800" i="1" dirty="0" err="1">
-                    <a:effectLst/>
-                    <a:latin typeface="Calibri" panose="020F0502020204030204" pitchFamily="34" charset="0"/>
-                    <a:ea typeface="Calibri" panose="020F0502020204030204" pitchFamily="34" charset="0"/>
-                    <a:cs typeface="Times New Roman" panose="02020603050405020304" pitchFamily="18" charset="0"/>
-                  </a:rPr>
-                  <a:t>d</a:t>
-                </a:r>
-                <a:r>
-                  <a:rPr lang="en-US" sz="1800" i="1" baseline="-25000" dirty="0" err="1">
-                    <a:effectLst/>
-                    <a:latin typeface="Calibri" panose="020F0502020204030204" pitchFamily="34" charset="0"/>
-                    <a:ea typeface="Calibri" panose="020F0502020204030204" pitchFamily="34" charset="0"/>
-                    <a:cs typeface="Times New Roman" panose="02020603050405020304" pitchFamily="18" charset="0"/>
-                  </a:rPr>
-                  <a:t>i,n</a:t>
-                </a:r>
-                <a:r>
-                  <a:rPr lang="en-US" sz="1800" i="1" dirty="0">
-                    <a:effectLst/>
-                    <a:latin typeface="Calibri" panose="020F0502020204030204" pitchFamily="34" charset="0"/>
-                    <a:ea typeface="Calibri" panose="020F0502020204030204" pitchFamily="34" charset="0"/>
-                    <a:cs typeface="Times New Roman" panose="02020603050405020304" pitchFamily="18" charset="0"/>
-                  </a:rPr>
-                  <a:t>)</a:t>
-                </a:r>
-                <a:r>
-                  <a:rPr lang="en-US" sz="1800" i="1" baseline="30000" dirty="0">
-                    <a:effectLst/>
-                    <a:latin typeface="Calibri" panose="020F0502020204030204" pitchFamily="34" charset="0"/>
-                    <a:ea typeface="Calibri" panose="020F0502020204030204" pitchFamily="34" charset="0"/>
-                    <a:cs typeface="Times New Roman" panose="02020603050405020304" pitchFamily="18" charset="0"/>
-                  </a:rPr>
-                  <a:t>2</a:t>
-                </a:r>
                 <a:endParaRPr lang="en-DE" sz="1800" dirty="0">
                   <a:effectLst/>
                   <a:latin typeface="Calibri" panose="020F0502020204030204" pitchFamily="34" charset="0"/>
@@ -7393,7 +7453,7 @@
             </p:txBody>
           </p:sp>
         </mc:Choice>
-        <mc:Fallback xmlns="">
+        <mc:Fallback>
           <p:sp>
             <p:nvSpPr>
               <p:cNvPr id="8" name="TextBox 7">
@@ -7411,7 +7471,7 @@
             <p:spPr>
               <a:xfrm>
                 <a:off x="7924300" y="4815188"/>
-                <a:ext cx="2325196" cy="442429"/>
+                <a:ext cx="2325196" cy="406458"/>
               </a:xfrm>
               <a:prstGeom prst="rect">
                 <a:avLst/>
@@ -7419,7 +7479,7 @@
               <a:blipFill>
                 <a:blip r:embed="rId2"/>
                 <a:stretch>
-                  <a:fillRect t="-85714" b="-140000"/>
+                  <a:fillRect t="-100000" b="-145455"/>
                 </a:stretch>
               </a:blipFill>
             </p:spPr>
@@ -8839,7 +8899,7 @@
           <p:nvPr/>
         </p:nvPicPr>
         <p:blipFill>
-          <a:blip r:embed="rId3"/>
+          <a:blip r:embed="rId2"/>
           <a:stretch>
             <a:fillRect/>
           </a:stretch>
